--- a/week4_deep_learning_gnn/slides.pptx
+++ b/week4_deep_learning_gnn/slides.pptx
@@ -1283,7 +1283,235 @@
           <a:lstStyle/>
           <a:p>
             <a:r>
-              <a:t>Spend 2-3 minutes on this cross-domain connection. In brain-computer interfaces, we represent the brain as a graph: each ECoG electrode is a node, edges represent functional connectivity. GNNs on brain graphs can decode speech intent, motor commands, or emotional states. The instructor's work at FUTRUE Neurosciences: 512 electrodes recording from the brain surface. This is the beauty of GNNs: the mathematical framework is the same whether you are predicting molecular toxicity or decoding brain signals.</a:t>
+              <a:t>DETAILED PRESENTER NOTES - CROSS-DOMAIN GNNs &amp; HUMAN PHYSIOLOGY</a:t>
+            </a:r>
+          </a:p>
+          <a:p/>
+          <a:p>
+            <a:r>
+              <a:t>Spend 4-5 minutes on this slide. This is where we bring together everything: GNNs from the lecture, physiology from the SpikerBot, and drug discovery.</a:t>
+            </a:r>
+          </a:p>
+          <a:p/>
+          <a:p>
+            <a:r>
+              <a:t>=== GNNs ON MOLECULAR GRAPHS ===</a:t>
+            </a:r>
+          </a:p>
+          <a:p>
+            <a:r>
+              <a:t>We covered this in detail earlier: atoms are nodes, bonds are edges, message passing aggregates neighbor information. The GNN learns molecular representations end-to-end. GCN, GAT, MPNN all follow this framework.</a:t>
+            </a:r>
+          </a:p>
+          <a:p/>
+          <a:p>
+            <a:r>
+              <a:t>=== GNNs ON BRAIN / PHYSIOLOGY GRAPHS ===</a:t>
+            </a:r>
+          </a:p>
+          <a:p>
+            <a:r>
+              <a:t>The SAME mathematical framework applies to physiological data. Here is how:</a:t>
+            </a:r>
+          </a:p>
+          <a:p/>
+          <a:p>
+            <a:r>
+              <a:t>1. EEG (Electroencephalography): Place 19-256 electrodes on the scalp. Each electrode is a NODE. Compute pairwise correlations (coherence, phase-locking value, or Granger causality) between electrode time series. These become EDGES. Now you have a brain graph. Feed it to a GNN to classify:</a:t>
+            </a:r>
+          </a:p>
+          <a:p>
+            <a:r>
+              <a:t>   - Sleep stages (wake, N1, N2, N3, REM)</a:t>
+            </a:r>
+          </a:p>
+          <a:p>
+            <a:r>
+              <a:t>   - Seizure detection (epilepsy monitoring)</a:t>
+            </a:r>
+          </a:p>
+          <a:p>
+            <a:r>
+              <a:t>   - Drug effects (sedatives increase slow-wave coherence, stimulants increase fast-frequency connectivity)</a:t>
+            </a:r>
+          </a:p>
+          <a:p>
+            <a:r>
+              <a:t>   Reference: Bessadok et al. (2022), Graph Neural Networks in Network Neuroscience, Medical Image Analysis 76:102333</a:t>
+            </a:r>
+          </a:p>
+          <a:p/>
+          <a:p>
+            <a:r>
+              <a:t>2. EMG (Electromyography): Record from multiple muscles simultaneously. Each muscle is a node. Correlations in activation timing become edges. GNNs can decode hand gestures for prosthetic control.</a:t>
+            </a:r>
+          </a:p>
+          <a:p/>
+          <a:p>
+            <a:r>
+              <a:t>3. ECG (Electrocardiography): A standard 12-lead ECG has 12 recording channels. Each lead is a node. Spatial and temporal correlations become edges. GNNs have been applied to arrhythmia detection.</a:t>
+            </a:r>
+          </a:p>
+          <a:p/>
+          <a:p>
+            <a:r>
+              <a:t>The KEY insight for students: the mathematical framework of message passing, aggregation, and readout is IDENTICAL whether the graph represents a molecule or a brain. The only difference is what the nodes and edges mean.</a:t>
+            </a:r>
+          </a:p>
+          <a:p/>
+          <a:p>
+            <a:r>
+              <a:t>=== HUMAN PHYSIOLOGY EXPERIMENTS ===</a:t>
+            </a:r>
+          </a:p>
+          <a:p>
+            <a:r>
+              <a:t>This is where students get hands-on with their OWN bodies. Using Backyard Brains equipment:</a:t>
+            </a:r>
+          </a:p>
+          <a:p/>
+          <a:p>
+            <a:r>
+              <a:t>1. EMG EXPERIMENT (Muscle SpikerShield, ~$60):</a:t>
+            </a:r>
+          </a:p>
+          <a:p>
+            <a:r>
+              <a:t>   - Attach surface electrodes to the forearm (flexor digitorum)</a:t>
+            </a:r>
+          </a:p>
+          <a:p>
+            <a:r>
+              <a:t>   - Ask students to grip with increasing force</a:t>
+            </a:r>
+          </a:p>
+          <a:p>
+            <a:r>
+              <a:t>   - Observe: EMG amplitude increases with force (motor unit recruitment)</a:t>
+            </a:r>
+          </a:p>
+          <a:p>
+            <a:r>
+              <a:t>   - Measure: RMS amplitude, median frequency, burst duration</a:t>
+            </a:r>
+          </a:p>
+          <a:p>
+            <a:r>
+              <a:t>   - Drug connection: neuromuscular blockers (e.g., rocuronium used in anesthesia) would reduce EMG amplitude. Myasthenia gravis (autoimmune attack on acetylcholine receptors) causes EMG decrement.</a:t>
+            </a:r>
+          </a:p>
+          <a:p>
+            <a:r>
+              <a:t>   - ML task: Can you predict grip force from EMG features? This is REGRESSION, just like predicting pIC50.</a:t>
+            </a:r>
+          </a:p>
+          <a:p/>
+          <a:p>
+            <a:r>
+              <a:t>2. ECG EXPERIMENT (Heart &amp; Brain SpikerShield, ~$150):</a:t>
+            </a:r>
+          </a:p>
+          <a:p>
+            <a:r>
+              <a:t>   - Record your own ECG using limb electrodes</a:t>
+            </a:r>
+          </a:p>
+          <a:p>
+            <a:r>
+              <a:t>   - Identify the P wave (atrial depolarization), QRS complex (ventricular depolarization), T wave (ventricular repolarization)</a:t>
+            </a:r>
+          </a:p>
+          <a:p>
+            <a:r>
+              <a:t>   - Measure the QT interval: time from Q wave onset to T wave end</a:t>
+            </a:r>
+          </a:p>
+          <a:p>
+            <a:r>
+              <a:t>   - Normal QT: 350-440 ms (corrected for heart rate using Bazett's formula: QTc = QT / sqrt(RR))</a:t>
+            </a:r>
+          </a:p>
+          <a:p>
+            <a:r>
+              <a:t>   - Drug safety: QT prolongation &gt; 500 ms is DANGEROUS. This is exactly what hERG-blocking drugs cause.</a:t>
+            </a:r>
+          </a:p>
+          <a:p>
+            <a:r>
+              <a:t>   - Have students measure their own QTc at rest, then after 2 minutes of exercise. QT shortens with faster heart rate (physiological).</a:t>
+            </a:r>
+          </a:p>
+          <a:p>
+            <a:r>
+              <a:t>   - Reference: Redfern et al. (2003), Relationships between preclinical cardiac electrophysiology, clinical QT interval prolongation and torsade de pointes, Cardiovascular Research 58:32-45</a:t>
+            </a:r>
+          </a:p>
+          <a:p/>
+          <a:p>
+            <a:r>
+              <a:t>3. CAFFEINE EXPERIMENT (non-invasive, safe):</a:t>
+            </a:r>
+          </a:p>
+          <a:p>
+            <a:r>
+              <a:t>   - Record EMG baseline, then have students drink coffee/tea</a:t>
+            </a:r>
+          </a:p>
+          <a:p>
+            <a:r>
+              <a:t>   - Record again after 30 minutes</a:t>
+            </a:r>
+          </a:p>
+          <a:p>
+            <a:r>
+              <a:t>   - Caffeine blocks adenosine receptors (A1, A2A) -&gt; increases neural excitability</a:t>
+            </a:r>
+          </a:p>
+          <a:p>
+            <a:r>
+              <a:t>   - Expected: slightly increased EMG amplitude, possibly increased heart rate on ECG</a:t>
+            </a:r>
+          </a:p>
+          <a:p>
+            <a:r>
+              <a:t>   - This is a real neuropharmacology experiment with a legal, safe drug!</a:t>
+            </a:r>
+          </a:p>
+          <a:p/>
+          <a:p>
+            <a:r>
+              <a:t>=== CONNECTING TO DRUG DISCOVERY ===</a:t>
+            </a:r>
+          </a:p>
+          <a:p>
+            <a:r>
+              <a:t>The evaluation principles from Week 3 apply directly:</a:t>
+            </a:r>
+          </a:p>
+          <a:p>
+            <a:r>
+              <a:t>- Train/test splitting: use temporal splits (before/after drug) just like temporal splits in QSAR</a:t>
+            </a:r>
+          </a:p>
+          <a:p>
+            <a:r>
+              <a:t>- Feature engineering: RMS, frequency, intervals = molecular descriptors</a:t>
+            </a:r>
+          </a:p>
+          <a:p>
+            <a:r>
+              <a:t>- Model evaluation: AUC-ROC for classifying drug effect present/absent</a:t>
+            </a:r>
+          </a:p>
+          <a:p>
+            <a:r>
+              <a:t>- Interpretability: SHAP on physiological features tells you which signal features changed most</a:t>
+            </a:r>
+          </a:p>
+          <a:p/>
+          <a:p>
+            <a:r>
+              <a:t>This is the power of the course: students learn ML principles that transfer across ALL biomedical domains.</a:t>
             </a:r>
           </a:p>
         </p:txBody>
@@ -7631,7 +7859,7 @@
               </a:defRPr>
             </a:pPr>
             <a:r>
-              <a:t>Cross-Domain: GNNs in Brain-Computer Interfaces</a:t>
+              <a:t>Cross-Domain: GNNs Meet Human Physiology</a:t>
             </a:r>
           </a:p>
         </p:txBody>
@@ -7670,7 +7898,7 @@
               </a:defRPr>
             </a:pPr>
             <a:r>
-              <a:t>Same GNN architecture, different domain:</a:t>
+              <a:t>Same GNN architecture, different biological domains:</a:t>
             </a:r>
           </a:p>
           <a:p>
@@ -7731,158 +7959,190 @@
               </a:defRPr>
             </a:pPr>
             <a:r>
-              <a:t>  Task: predict molecular properties</a:t>
-            </a:r>
-          </a:p>
-          <a:p>
-            <a:pPr>
-              <a:spcAft>
-                <a:spcPts val="800"/>
-              </a:spcAft>
-              <a:defRPr sz="2000">
-                <a:solidFill>
-                  <a:srgbClr val="323232"/>
-                </a:solidFill>
-                <a:latin typeface="Calibri"/>
-              </a:defRPr>
-            </a:pPr>
-          </a:p>
-          <a:p>
-            <a:pPr>
-              <a:spcAft>
-                <a:spcPts val="800"/>
-              </a:spcAft>
-              <a:defRPr sz="2000">
-                <a:solidFill>
-                  <a:srgbClr val="323232"/>
-                </a:solidFill>
-                <a:latin typeface="Calibri"/>
-              </a:defRPr>
-            </a:pPr>
-            <a:r>
-              <a:t>Brain connectivity graph:</a:t>
-            </a:r>
-          </a:p>
-          <a:p>
-            <a:pPr>
-              <a:spcAft>
-                <a:spcPts val="800"/>
-              </a:spcAft>
-              <a:defRPr sz="2000">
-                <a:solidFill>
-                  <a:srgbClr val="323232"/>
-                </a:solidFill>
-                <a:latin typeface="Calibri"/>
-              </a:defRPr>
-            </a:pPr>
-            <a:r>
-              <a:t>  Nodes = brain regions/electrodes | Edges = functional connectivity</a:t>
-            </a:r>
-          </a:p>
-          <a:p>
-            <a:pPr>
-              <a:spcAft>
-                <a:spcPts val="800"/>
-              </a:spcAft>
-              <a:defRPr sz="2000">
-                <a:solidFill>
-                  <a:srgbClr val="323232"/>
-                </a:solidFill>
-                <a:latin typeface="Calibri"/>
-              </a:defRPr>
-            </a:pPr>
-            <a:r>
-              <a:t>  Task: decode neural intent (speech, movement)</a:t>
-            </a:r>
-          </a:p>
-          <a:p>
-            <a:pPr>
-              <a:spcAft>
-                <a:spcPts val="800"/>
-              </a:spcAft>
-              <a:defRPr sz="2000">
-                <a:solidFill>
-                  <a:srgbClr val="323232"/>
-                </a:solidFill>
-                <a:latin typeface="Calibri"/>
-              </a:defRPr>
-            </a:pPr>
-          </a:p>
-          <a:p>
-            <a:pPr>
-              <a:spcAft>
-                <a:spcPts val="800"/>
-              </a:spcAft>
-              <a:defRPr sz="2000">
-                <a:solidFill>
-                  <a:srgbClr val="323232"/>
-                </a:solidFill>
-                <a:latin typeface="Calibri"/>
-              </a:defRPr>
-            </a:pPr>
-            <a:r>
-              <a:t>The instructor's research (FUTRUE Neurosciences):</a:t>
-            </a:r>
-          </a:p>
-          <a:p>
-            <a:pPr>
-              <a:spcAft>
-                <a:spcPts val="800"/>
-              </a:spcAft>
-              <a:defRPr sz="2000">
-                <a:solidFill>
-                  <a:srgbClr val="323232"/>
-                </a:solidFill>
-                <a:latin typeface="Calibri"/>
-              </a:defRPr>
-            </a:pPr>
-            <a:r>
-              <a:t>  512-channel ECoG grid -&gt; electrode connectivity graph -&gt; GNN decoder</a:t>
-            </a:r>
-          </a:p>
-          <a:p>
-            <a:pPr>
-              <a:spcAft>
-                <a:spcPts val="800"/>
-              </a:spcAft>
-              <a:defRPr sz="2000">
-                <a:solidFill>
-                  <a:srgbClr val="323232"/>
-                </a:solidFill>
-                <a:latin typeface="Calibri"/>
-              </a:defRPr>
-            </a:pPr>
-            <a:r>
-              <a:t>  Same message passing, same readout - different signal domain</a:t>
-            </a:r>
-          </a:p>
-          <a:p>
-            <a:pPr>
-              <a:spcAft>
-                <a:spcPts val="800"/>
-              </a:spcAft>
-              <a:defRPr sz="2000">
-                <a:solidFill>
-                  <a:srgbClr val="323232"/>
-                </a:solidFill>
-                <a:latin typeface="Calibri"/>
-              </a:defRPr>
-            </a:pPr>
-          </a:p>
-          <a:p>
-            <a:pPr>
-              <a:spcAft>
-                <a:spcPts val="800"/>
-              </a:spcAft>
-              <a:defRPr sz="2000">
-                <a:solidFill>
-                  <a:srgbClr val="323232"/>
-                </a:solidFill>
-                <a:latin typeface="Calibri"/>
-              </a:defRPr>
-            </a:pPr>
-            <a:r>
-              <a:t>Key insight: graph learning is a UNIVERSAL framework</a:t>
+              <a:t>  Task: predict molecular properties (toxicity, solubility, binding)</a:t>
+            </a:r>
+          </a:p>
+          <a:p>
+            <a:pPr>
+              <a:spcAft>
+                <a:spcPts val="800"/>
+              </a:spcAft>
+              <a:defRPr sz="2000">
+                <a:solidFill>
+                  <a:srgbClr val="323232"/>
+                </a:solidFill>
+                <a:latin typeface="Calibri"/>
+              </a:defRPr>
+            </a:pPr>
+          </a:p>
+          <a:p>
+            <a:pPr>
+              <a:spcAft>
+                <a:spcPts val="800"/>
+              </a:spcAft>
+              <a:defRPr sz="2000">
+                <a:solidFill>
+                  <a:srgbClr val="323232"/>
+                </a:solidFill>
+                <a:latin typeface="Calibri"/>
+              </a:defRPr>
+            </a:pPr>
+            <a:r>
+              <a:t>Neural / physiological graph:</a:t>
+            </a:r>
+          </a:p>
+          <a:p>
+            <a:pPr>
+              <a:spcAft>
+                <a:spcPts val="800"/>
+              </a:spcAft>
+              <a:defRPr sz="2000">
+                <a:solidFill>
+                  <a:srgbClr val="323232"/>
+                </a:solidFill>
+                <a:latin typeface="Calibri"/>
+              </a:defRPr>
+            </a:pPr>
+            <a:r>
+              <a:t>  Nodes = recording electrodes (EEG/EMG/ECG sensors)</a:t>
+            </a:r>
+          </a:p>
+          <a:p>
+            <a:pPr>
+              <a:spcAft>
+                <a:spcPts val="800"/>
+              </a:spcAft>
+              <a:defRPr sz="2000">
+                <a:solidFill>
+                  <a:srgbClr val="323232"/>
+                </a:solidFill>
+                <a:latin typeface="Calibri"/>
+              </a:defRPr>
+            </a:pPr>
+            <a:r>
+              <a:t>  Edges = functional connectivity (correlation between channels)</a:t>
+            </a:r>
+          </a:p>
+          <a:p>
+            <a:pPr>
+              <a:spcAft>
+                <a:spcPts val="800"/>
+              </a:spcAft>
+              <a:defRPr sz="2000">
+                <a:solidFill>
+                  <a:srgbClr val="323232"/>
+                </a:solidFill>
+                <a:latin typeface="Calibri"/>
+              </a:defRPr>
+            </a:pPr>
+            <a:r>
+              <a:t>  Task: classify brain states, detect drug effects on physiology</a:t>
+            </a:r>
+          </a:p>
+          <a:p>
+            <a:pPr>
+              <a:spcAft>
+                <a:spcPts val="800"/>
+              </a:spcAft>
+              <a:defRPr sz="2000">
+                <a:solidFill>
+                  <a:srgbClr val="323232"/>
+                </a:solidFill>
+                <a:latin typeface="Calibri"/>
+              </a:defRPr>
+            </a:pPr>
+          </a:p>
+          <a:p>
+            <a:pPr>
+              <a:spcAft>
+                <a:spcPts val="800"/>
+              </a:spcAft>
+              <a:defRPr sz="2000">
+                <a:solidFill>
+                  <a:srgbClr val="323232"/>
+                </a:solidFill>
+                <a:latin typeface="Calibri"/>
+              </a:defRPr>
+            </a:pPr>
+            <a:r>
+              <a:t>Human physiology experiments with SpikerBot:</a:t>
+            </a:r>
+          </a:p>
+          <a:p>
+            <a:pPr>
+              <a:spcAft>
+                <a:spcPts val="800"/>
+              </a:spcAft>
+              <a:defRPr sz="2000">
+                <a:solidFill>
+                  <a:srgbClr val="323232"/>
+                </a:solidFill>
+                <a:latin typeface="Calibri"/>
+              </a:defRPr>
+            </a:pPr>
+            <a:r>
+              <a:t>  Record EMG from your own muscles - see motor unit recruitment</a:t>
+            </a:r>
+          </a:p>
+          <a:p>
+            <a:pPr>
+              <a:spcAft>
+                <a:spcPts val="800"/>
+              </a:spcAft>
+              <a:defRPr sz="2000">
+                <a:solidFill>
+                  <a:srgbClr val="323232"/>
+                </a:solidFill>
+                <a:latin typeface="Calibri"/>
+              </a:defRPr>
+            </a:pPr>
+            <a:r>
+              <a:t>  Record ECG - measure QT interval (hERG drug safety target!)</a:t>
+            </a:r>
+          </a:p>
+          <a:p>
+            <a:pPr>
+              <a:spcAft>
+                <a:spcPts val="800"/>
+              </a:spcAft>
+              <a:defRPr sz="2000">
+                <a:solidFill>
+                  <a:srgbClr val="323232"/>
+                </a:solidFill>
+                <a:latin typeface="Calibri"/>
+              </a:defRPr>
+            </a:pPr>
+            <a:r>
+              <a:t>  Compare: how does caffeine / exercise change YOUR signals?</a:t>
+            </a:r>
+          </a:p>
+          <a:p>
+            <a:pPr>
+              <a:spcAft>
+                <a:spcPts val="800"/>
+              </a:spcAft>
+              <a:defRPr sz="2000">
+                <a:solidFill>
+                  <a:srgbClr val="323232"/>
+                </a:solidFill>
+                <a:latin typeface="Calibri"/>
+              </a:defRPr>
+            </a:pPr>
+          </a:p>
+          <a:p>
+            <a:pPr>
+              <a:spcAft>
+                <a:spcPts val="800"/>
+              </a:spcAft>
+              <a:defRPr sz="2000">
+                <a:solidFill>
+                  <a:srgbClr val="323232"/>
+                </a:solidFill>
+                <a:latin typeface="Calibri"/>
+              </a:defRPr>
+            </a:pPr>
+            <a:r>
+              <a:t>Key insight: graph learning is a UNIVERSAL framework for biology</a:t>
             </a:r>
           </a:p>
         </p:txBody>

--- a/week4_deep_learning_gnn/slides.pptx
+++ b/week4_deep_learning_gnn/slides.pptx
@@ -723,7 +723,19 @@
           <a:lstStyle/>
           <a:p>
             <a:r>
-              <a:t>5-minute discussion. RF wins when data is small, interpretability is critical, or computational resources are limited. GNN wins when data is large. Yang et al. 2019 showed Chemprop beat RF on 7 of 8 MoleculeNet tasks, but RF won on 1. Always have an RF/XGBoost baseline.</a:t>
+              <a:t>5-minute discussion. RF wins when data is small, interpretability is critical, or computational resources are limited. GNN wins when data is large. Yang et al. 2019 showed Chemprop beat RF on 7 of 8 MoleculeNet tasks, but RF won on 1.</a:t>
+            </a:r>
+          </a:p>
+          <a:p/>
+          <a:p>
+            <a:r>
+              <a:t>Neuroscience angle: In connectomics, if you have a small circuit (e.g., the 60 neurons in the T5 motion detection pathway), RF on hand-crafted connectivity features might outperform a GNN because the graph is too small for the GNN to learn meaningful representations. But on the full 140,000-neuron fly brain connectome, GNNs would be essential because hand-crafting features for that scale is impossible.</a:t>
+            </a:r>
+          </a:p>
+          <a:p/>
+          <a:p>
+            <a:r>
+              <a:t>Same principle in drug discovery: for BACE (1,500 compounds), RF is competitive. For HIV (41,000 compounds), GNN wins. ALWAYS have an RF/XGBoost baseline.</a:t>
             </a:r>
           </a:p>
         </p:txBody>
@@ -1213,7 +1225,149 @@
           <a:lstStyle/>
           <a:p>
             <a:r>
-              <a:t>Spend 3-4 minutes. The Stokes et al. 2020 Cell paper on halicin is a fantastic story: researchers trained a neural network on 2,335 molecules, then screened compounds. Halicin (originally an anti-diabetic candidate) was identified as a potent broad-spectrum antibiotic. Chemprop from the Barzilay/Jaakkola lab at MIT is an excellent open-source tool. Students can use it for their course projects.</a:t>
+              <a:t>Spend 3-4 minutes.</a:t>
+            </a:r>
+          </a:p>
+          <a:p/>
+          <a:p>
+            <a:r>
+              <a:t>=== DRUG DISCOVERY GNNs ===</a:t>
+            </a:r>
+          </a:p>
+          <a:p>
+            <a:r>
+              <a:t>Stokes et al. 2020 Cell paper: trained a neural network on 2,335 molecules, screened the Broad Institute repurposing library, discovered halicin as a potent broad-spectrum antibiotic active against pan-resistant A. baumannii. Chemprop (Barzilay/Jaakkola lab, MIT) is the best open-source molecular GNN.</a:t>
+            </a:r>
+          </a:p>
+          <a:p/>
+          <a:p>
+            <a:r>
+              <a:t>=== NEUROSCIENCE GNNs ===</a:t>
+            </a:r>
+          </a:p>
+          <a:p/>
+          <a:p>
+            <a:r>
+              <a:t>1. CONNECTOMICS GNNs:</a:t>
+            </a:r>
+          </a:p>
+          <a:p>
+            <a:r>
+              <a:t>   - The Drosophila brain connectome has ~140,000 neurons and ~50 million synapses</a:t>
+            </a:r>
+          </a:p>
+          <a:p>
+            <a:r>
+              <a:t>   - This is the ultimate graph dataset: neurons = nodes, synapses = directed edges</a:t>
+            </a:r>
+          </a:p>
+          <a:p>
+            <a:r>
+              <a:t>   - GNNs can predict neuron cell types from local connectivity patterns</a:t>
+            </a:r>
+          </a:p>
+          <a:p>
+            <a:r>
+              <a:t>   - Analogous to predicting molecular activity from graph structure</a:t>
+            </a:r>
+          </a:p>
+          <a:p>
+            <a:r>
+              <a:t>   - Schlegel et al. (2024, Nature 634:139-152) used graph-based approaches for cell typing</a:t>
+            </a:r>
+          </a:p>
+          <a:p/>
+          <a:p>
+            <a:r>
+              <a:t>2. BRAIN IMAGING GNNs:</a:t>
+            </a:r>
+          </a:p>
+          <a:p>
+            <a:r>
+              <a:t>   - Bessadok et al. (2022, Medical Image Analysis) reviewed GNNs in network neuroscience</a:t>
+            </a:r>
+          </a:p>
+          <a:p>
+            <a:r>
+              <a:t>   - EEG/fMRI data -&gt; brain graphs -&gt; GNN classification</a:t>
+            </a:r>
+          </a:p>
+          <a:p>
+            <a:r>
+              <a:t>   - Applications: Alzheimer's detection, seizure prediction, drug effect monitoring</a:t>
+            </a:r>
+          </a:p>
+          <a:p/>
+          <a:p>
+            <a:r>
+              <a:t>3. DRUG EFFECT ON BRAIN GRAPHS:</a:t>
+            </a:r>
+          </a:p>
+          <a:p>
+            <a:r>
+              <a:t>   - Administer a drug (e.g., SSRI for depression)</a:t>
+            </a:r>
+          </a:p>
+          <a:p>
+            <a:r>
+              <a:t>   - Record brain connectivity (fMRI, EEG) before and after</a:t>
+            </a:r>
+          </a:p>
+          <a:p>
+            <a:r>
+              <a:t>   - Build graphs from both timepoints</a:t>
+            </a:r>
+          </a:p>
+          <a:p>
+            <a:r>
+              <a:t>   - GNN classifies: did the drug change brain connectivity?</a:t>
+            </a:r>
+          </a:p>
+          <a:p>
+            <a:r>
+              <a:t>   - This is 'pharmacological connectomics' - a growing field</a:t>
+            </a:r>
+          </a:p>
+          <a:p/>
+          <a:p>
+            <a:r>
+              <a:t>=== FROM DR. SERBE-KAMP'S RESEARCH ===</a:t>
+            </a:r>
+          </a:p>
+          <a:p>
+            <a:r>
+              <a:t>Dr. Serbe-Kamp's work on the Drosophila visual motion detection circuit is a perfect example of how connectomics and functional neuroscience work together:</a:t>
+            </a:r>
+          </a:p>
+          <a:p>
+            <a:r>
+              <a:t>- Connectomics (EM) maps the STRUCTURAL graph: which neurons are connected</a:t>
+            </a:r>
+          </a:p>
+          <a:p>
+            <a:r>
+              <a:t>- Calcium imaging and electrophysiology measure the FUNCTIONAL properties</a:t>
+            </a:r>
+          </a:p>
+          <a:p>
+            <a:r>
+              <a:t>- Together: the structure constrains function, and function validates structure</a:t>
+            </a:r>
+          </a:p>
+          <a:p>
+            <a:r>
+              <a:t>- In Serbe et al. (2016, Neuron): used both approaches to map T5 (OFF motion) inputs</a:t>
+            </a:r>
+          </a:p>
+          <a:p>
+            <a:r>
+              <a:t>- In Haag, Arenz, Serbe-Kamp et al. (2023, Nature Neurosci.): identified GluClα as mediating inhibition across three circuit levels</a:t>
+            </a:r>
+          </a:p>
+          <a:p/>
+          <a:p>
+            <a:r>
+              <a:t>This is exactly what modern drug discovery does: structural information (protein structures, binding sites) + functional assays (IC50, EC50) together inform drug design.</a:t>
             </a:r>
           </a:p>
         </p:txBody>
@@ -1283,235 +1437,224 @@
           <a:lstStyle/>
           <a:p>
             <a:r>
-              <a:t>DETAILED PRESENTER NOTES - CROSS-DOMAIN GNNs &amp; HUMAN PHYSIOLOGY</a:t>
+              <a:t>DETAILED PRESENTER NOTES - CROSS-DOMAIN GNNs, CONNECTOMICS &amp; DROSOPHILA</a:t>
             </a:r>
           </a:p>
           <a:p/>
           <a:p>
             <a:r>
-              <a:t>Spend 4-5 minutes on this slide. This is where we bring together everything: GNNs from the lecture, physiology from the SpikerBot, and drug discovery.</a:t>
+              <a:t>Spend 4-5 minutes on this slide. This connects GNNs to the instructor's actual neuroscience research.</a:t>
             </a:r>
           </a:p>
           <a:p/>
           <a:p>
             <a:r>
-              <a:t>=== GNNs ON MOLECULAR GRAPHS ===</a:t>
-            </a:r>
-          </a:p>
-          <a:p>
-            <a:r>
-              <a:t>We covered this in detail earlier: atoms are nodes, bonds are edges, message passing aggregates neighbor information. The GNN learns molecular representations end-to-end. GCN, GAT, MPNN all follow this framework.</a:t>
+              <a:t>=== THE DROSOPHILA CONNECTOME ===</a:t>
+            </a:r>
+          </a:p>
+          <a:p>
+            <a:r>
+              <a:t>The FlyWire project (Dorkenwald et al. 2024, Nature) reconstructed the complete connectome of an adult Drosophila brain:</a:t>
+            </a:r>
+          </a:p>
+          <a:p>
+            <a:r>
+              <a:t>- ~140,000 neurons fully reconstructed from electron microscopy (EM) serial sections</a:t>
+            </a:r>
+          </a:p>
+          <a:p>
+            <a:r>
+              <a:t>- ~50 million chemical synapses mapped</a:t>
+            </a:r>
+          </a:p>
+          <a:p>
+            <a:r>
+              <a:t>- This is literally a GRAPH: neurons are nodes, synapses are directed edges (with synapse count as edge weight)</a:t>
+            </a:r>
+          </a:p>
+          <a:p>
+            <a:r>
+              <a:t>- This is the largest complete animal brain connectome and a landmark in neuroscience</a:t>
             </a:r>
           </a:p>
           <a:p/>
           <a:p>
             <a:r>
-              <a:t>=== GNNs ON BRAIN / PHYSIOLOGY GRAPHS ===</a:t>
-            </a:r>
-          </a:p>
-          <a:p>
-            <a:r>
-              <a:t>The SAME mathematical framework applies to physiological data. Here is how:</a:t>
+              <a:t>=== DR. SERBE-KAMP'S CONNECTOMICS RESEARCH ===</a:t>
+            </a:r>
+          </a:p>
+          <a:p>
+            <a:r>
+              <a:t>Dr. Serbe-Kamp used connectomics extensively in his research on the Drosophila visual system:</a:t>
             </a:r>
           </a:p>
           <a:p/>
           <a:p>
             <a:r>
-              <a:t>1. EEG (Electroencephalography): Place 19-256 electrodes on the scalp. Each electrode is a NODE. Compute pairwise correlations (coherence, phase-locking value, or Granger causality) between electrode time series. These become EDGES. Now you have a brain graph. Feed it to a GNN to classify:</a:t>
-            </a:r>
-          </a:p>
-          <a:p>
-            <a:r>
-              <a:t>   - Sleep stages (wake, N1, N2, N3, REM)</a:t>
-            </a:r>
-          </a:p>
-          <a:p>
-            <a:r>
-              <a:t>   - Seizure detection (epilepsy monitoring)</a:t>
-            </a:r>
-          </a:p>
-          <a:p>
-            <a:r>
-              <a:t>   - Drug effects (sedatives increase slow-wave coherence, stimulants increase fast-frequency connectivity)</a:t>
-            </a:r>
-          </a:p>
-          <a:p>
-            <a:r>
-              <a:t>   Reference: Bessadok et al. (2022), Graph Neural Networks in Network Neuroscience, Medical Image Analysis 76:102333</a:t>
+              <a:t>'Comprehensive Characterization of the Major Presynaptic Elements to the Drosophila OFF Motion Detector' (Serbe et al., 2016, Neuron 89:829-841):</a:t>
+            </a:r>
+          </a:p>
+          <a:p>
+            <a:r>
+              <a:t>- Used EM connectomics to map all synaptic inputs to T5 (OFF motion-detecting) neurons</a:t>
+            </a:r>
+          </a:p>
+          <a:p>
+            <a:r>
+              <a:t>- Identified specific medulla interneuron types providing input: Tm1, Tm2, Tm4, Tm9</a:t>
+            </a:r>
+          </a:p>
+          <a:p>
+            <a:r>
+              <a:t>- Combined connectomics with functional imaging (calcium imaging) and optogenetics</a:t>
+            </a:r>
+          </a:p>
+          <a:p>
+            <a:r>
+              <a:t>- This paper demonstrates connectomics-guided target identification: by mapping the circuit, you identify which cell types to target</a:t>
             </a:r>
           </a:p>
           <a:p/>
           <a:p>
             <a:r>
-              <a:t>2. EMG (Electromyography): Record from multiple muscles simultaneously. Each muscle is a node. Correlations in activation timing become edges. GNNs can decode hand gestures for prosthetic control.</a:t>
+              <a:t>Earlier connectomics work on the optic lobe:</a:t>
+            </a:r>
+          </a:p>
+          <a:p>
+            <a:r>
+              <a:t>- Takemura et al. (2013), Nature 500:175-181 - 'A visual motion detection circuit suggested by Drosophila connectomics'</a:t>
+            </a:r>
+          </a:p>
+          <a:p>
+            <a:r>
+              <a:t>- Shinomiya et al. (2019), eLife 8:e42756 - Expanded medulla connectome</a:t>
+            </a:r>
+          </a:p>
+          <a:p>
+            <a:r>
+              <a:t>- These studies directly informed the models of motion detection that Dr. Serbe-Kamp's functional work validated</a:t>
             </a:r>
           </a:p>
           <a:p/>
           <a:p>
             <a:r>
-              <a:t>3. ECG (Electrocardiography): A standard 12-lead ECG has 12 recording channels. Each lead is a node. Spatial and temporal correlations become edges. GNNs have been applied to arrhythmia detection.</a:t>
+              <a:t>=== GNNs ON CONNECTOME DATA ===</a:t>
+            </a:r>
+          </a:p>
+          <a:p>
+            <a:r>
+              <a:t>The connectome is a natural graph dataset for GNNs:</a:t>
             </a:r>
           </a:p>
           <a:p/>
           <a:p>
             <a:r>
-              <a:t>The KEY insight for students: the mathematical framework of message passing, aggregation, and readout is IDENTICAL whether the graph represents a molecule or a brain. The only difference is what the nodes and edges mean.</a:t>
+              <a:t>1. NODE CLASSIFICATION: Given a neuron's connectivity pattern, predict its cell type (e.g., T4a, T4b, T4c, T4d for the four direction-selective subtypes). This is analogous to predicting molecular activity from graph structure.</a:t>
             </a:r>
           </a:p>
           <a:p/>
           <a:p>
             <a:r>
-              <a:t>=== HUMAN PHYSIOLOGY EXPERIMENTS ===</a:t>
-            </a:r>
-          </a:p>
-          <a:p>
-            <a:r>
-              <a:t>This is where students get hands-on with their OWN bodies. Using Backyard Brains equipment:</a:t>
+              <a:t>2. LINK PREDICTION: Predict missing or weak synapses. Analogous to predicting molecular interactions.</a:t>
             </a:r>
           </a:p>
           <a:p/>
           <a:p>
             <a:r>
-              <a:t>1. EMG EXPERIMENT (Muscle SpikerShield, ~$60):</a:t>
-            </a:r>
-          </a:p>
-          <a:p>
-            <a:r>
-              <a:t>   - Attach surface electrodes to the forearm (flexor digitorum)</a:t>
-            </a:r>
-          </a:p>
-          <a:p>
-            <a:r>
-              <a:t>   - Ask students to grip with increasing force</a:t>
-            </a:r>
-          </a:p>
-          <a:p>
-            <a:r>
-              <a:t>   - Observe: EMG amplitude increases with force (motor unit recruitment)</a:t>
-            </a:r>
-          </a:p>
-          <a:p>
-            <a:r>
-              <a:t>   - Measure: RMS amplitude, median frequency, burst duration</a:t>
-            </a:r>
-          </a:p>
-          <a:p>
-            <a:r>
-              <a:t>   - Drug connection: neuromuscular blockers (e.g., rocuronium used in anesthesia) would reduce EMG amplitude. Myasthenia gravis (autoimmune attack on acetylcholine receptors) causes EMG decrement.</a:t>
-            </a:r>
-          </a:p>
-          <a:p>
-            <a:r>
-              <a:t>   - ML task: Can you predict grip force from EMG features? This is REGRESSION, just like predicting pIC50.</a:t>
+              <a:t>3. GRAPH CLASSIFICATION: Given a local circuit (subgraph), classify its function (motion detection, color processing, etc.). Analogous to predicting molecular properties from the whole graph.</a:t>
             </a:r>
           </a:p>
           <a:p/>
           <a:p>
             <a:r>
-              <a:t>2. ECG EXPERIMENT (Heart &amp; Brain SpikerShield, ~$150):</a:t>
-            </a:r>
-          </a:p>
-          <a:p>
-            <a:r>
-              <a:t>   - Record your own ECG using limb electrodes</a:t>
-            </a:r>
-          </a:p>
-          <a:p>
-            <a:r>
-              <a:t>   - Identify the P wave (atrial depolarization), QRS complex (ventricular depolarization), T wave (ventricular repolarization)</a:t>
-            </a:r>
-          </a:p>
-          <a:p>
-            <a:r>
-              <a:t>   - Measure the QT interval: time from Q wave onset to T wave end</a:t>
-            </a:r>
-          </a:p>
-          <a:p>
-            <a:r>
-              <a:t>   - Normal QT: 350-440 ms (corrected for heart rate using Bazett's formula: QTc = QT / sqrt(RR))</a:t>
-            </a:r>
-          </a:p>
-          <a:p>
-            <a:r>
-              <a:t>   - Drug safety: QT prolongation &gt; 500 ms is DANGEROUS. This is exactly what hERG-blocking drugs cause.</a:t>
-            </a:r>
-          </a:p>
-          <a:p>
-            <a:r>
-              <a:t>   - Have students measure their own QTc at rest, then after 2 minutes of exercise. QT shortens with faster heart rate (physiological).</a:t>
-            </a:r>
-          </a:p>
-          <a:p>
-            <a:r>
-              <a:t>   - Reference: Redfern et al. (2003), Relationships between preclinical cardiac electrophysiology, clinical QT interval prolongation and torsade de pointes, Cardiovascular Research 58:32-45</a:t>
+              <a:t>4. TARGET IDENTIFICATION: Use GNNs to identify hub neurons (highly connected, critical for circuit function) that could be drug targets. This is like using network analysis to identify key proteins in disease pathways.</a:t>
             </a:r>
           </a:p>
           <a:p/>
           <a:p>
             <a:r>
-              <a:t>3. CAFFEINE EXPERIMENT (non-invasive, safe):</a:t>
-            </a:r>
-          </a:p>
-          <a:p>
-            <a:r>
-              <a:t>   - Record EMG baseline, then have students drink coffee/tea</a:t>
-            </a:r>
-          </a:p>
-          <a:p>
-            <a:r>
-              <a:t>   - Record again after 30 minutes</a:t>
-            </a:r>
-          </a:p>
-          <a:p>
-            <a:r>
-              <a:t>   - Caffeine blocks adenosine receptors (A1, A2A) -&gt; increases neural excitability</a:t>
-            </a:r>
-          </a:p>
-          <a:p>
-            <a:r>
-              <a:t>   - Expected: slightly increased EMG amplitude, possibly increased heart rate on ECG</a:t>
-            </a:r>
-          </a:p>
-          <a:p>
-            <a:r>
-              <a:t>   - This is a real neuropharmacology experiment with a legal, safe drug!</a:t>
+              <a:t>References:</a:t>
+            </a:r>
+          </a:p>
+          <a:p>
+            <a:r>
+              <a:t>- Dorkenwald et al. (2024). Neuronal wiring diagram of an adult brain. Nature 634:124-138.</a:t>
+            </a:r>
+          </a:p>
+          <a:p>
+            <a:r>
+              <a:t>- Schlegel et al. (2024). Whole-brain annotation and multi-connectome cell typing of Drosophila. Nature 634:139-152.</a:t>
+            </a:r>
+          </a:p>
+          <a:p>
+            <a:r>
+              <a:t>- Zeng et al. (2023). Using graph neural networks for cell-type classification in connectomics. Cell Reports Methods 3:100532.</a:t>
             </a:r>
           </a:p>
           <a:p/>
           <a:p>
             <a:r>
-              <a:t>=== CONNECTING TO DRUG DISCOVERY ===</a:t>
-            </a:r>
-          </a:p>
-          <a:p>
-            <a:r>
-              <a:t>The evaluation principles from Week 3 apply directly:</a:t>
-            </a:r>
-          </a:p>
-          <a:p>
-            <a:r>
-              <a:t>- Train/test splitting: use temporal splits (before/after drug) just like temporal splits in QSAR</a:t>
-            </a:r>
-          </a:p>
-          <a:p>
-            <a:r>
-              <a:t>- Feature engineering: RMS, frequency, intervals = molecular descriptors</a:t>
-            </a:r>
-          </a:p>
-          <a:p>
-            <a:r>
-              <a:t>- Model evaluation: AUC-ROC for classifying drug effect present/absent</a:t>
-            </a:r>
-          </a:p>
-          <a:p>
-            <a:r>
-              <a:t>- Interpretability: SHAP on physiological features tells you which signal features changed most</a:t>
+              <a:t>=== HUMAN PHYSIOLOGY GRAPH APPLICATIONS ===</a:t>
             </a:r>
           </a:p>
           <a:p/>
           <a:p>
             <a:r>
-              <a:t>This is the power of the course: students learn ML principles that transfer across ALL biomedical domains.</a:t>
+              <a:t>1. EEG brain graphs: Electrodes = nodes, correlations = edges. GNNs classify sleep stages, detect seizures.</a:t>
+            </a:r>
+          </a:p>
+          <a:p>
+            <a:r>
+              <a:t>   - Bessadok et al. (2022), Medical Image Analysis 76:102333</a:t>
+            </a:r>
+          </a:p>
+          <a:p/>
+          <a:p>
+            <a:r>
+              <a:t>2. EMG recordings: Muscles = nodes, coordination patterns = edges. GNNs decode gestures.</a:t>
+            </a:r>
+          </a:p>
+          <a:p/>
+          <a:p>
+            <a:r>
+              <a:t>3. ECG: Leads = nodes. GNNs detect arrhythmias.</a:t>
+            </a:r>
+          </a:p>
+          <a:p/>
+          <a:p>
+            <a:r>
+              <a:t>=== SPIKERBOT EXPERIMENTS ===</a:t>
+            </a:r>
+          </a:p>
+          <a:p>
+            <a:r>
+              <a:t>Students record their own EMG/ECG and can build simple graphs:</a:t>
+            </a:r>
+          </a:p>
+          <a:p>
+            <a:r>
+              <a:t>- Record from 2+ muscle groups simultaneously (biceps + triceps)</a:t>
+            </a:r>
+          </a:p>
+          <a:p>
+            <a:r>
+              <a:t>- Compute correlation between channels</a:t>
+            </a:r>
+          </a:p>
+          <a:p>
+            <a:r>
+              <a:t>- This creates a mini 2-node graph</a:t>
+            </a:r>
+          </a:p>
+          <a:p>
+            <a:r>
+              <a:t>- Scale up to 8 channels with the Muscle SpikerShield Pro</a:t>
+            </a:r>
+          </a:p>
+          <a:p/>
+          <a:p>
+            <a:r>
+              <a:t>The message: the mathematical framework of GNNs (message passing, aggregation, readout) is IDENTICAL whether the graph represents molecules, brain circuits, or physiological recordings.</a:t>
             </a:r>
           </a:p>
         </p:txBody>
@@ -5517,7 +5660,7 @@
               </a:defRPr>
             </a:pPr>
             <a:r>
-              <a:t>Reflect on: your experience in the practical</a:t>
+              <a:t>Neuroscience angle: would a GNN on a small Drosophila circuit outperform RF on features?</a:t>
             </a:r>
           </a:p>
         </p:txBody>
@@ -7520,7 +7663,7 @@
               </a:defRPr>
             </a:pPr>
             <a:r>
-              <a:t>Real-World GNN Applications in Pharma</a:t>
+              <a:t>Real-World GNN Applications: Pharma &amp; Neuroscience</a:t>
             </a:r>
           </a:p>
         </p:txBody>
@@ -7559,145 +7702,177 @@
               </a:defRPr>
             </a:pPr>
             <a:r>
-              <a:t>Stokes et al. (2020), Cell 180:688-702 - Halicin discovery</a:t>
-            </a:r>
-          </a:p>
-          <a:p>
-            <a:pPr>
-              <a:spcAft>
-                <a:spcPts val="800"/>
-              </a:spcAft>
-              <a:defRPr sz="2000">
-                <a:solidFill>
-                  <a:srgbClr val="323232"/>
-                </a:solidFill>
-                <a:latin typeface="Calibri"/>
-              </a:defRPr>
-            </a:pPr>
-            <a:r>
-              <a:t>  Neural networks to discover a novel antibiotic from 100M+ molecules</a:t>
-            </a:r>
-          </a:p>
-          <a:p>
-            <a:pPr>
-              <a:spcAft>
-                <a:spcPts val="800"/>
-              </a:spcAft>
-              <a:defRPr sz="2000">
-                <a:solidFill>
-                  <a:srgbClr val="323232"/>
-                </a:solidFill>
-                <a:latin typeface="Calibri"/>
-              </a:defRPr>
-            </a:pPr>
-            <a:r>
-              <a:t>  Active against pan-resistant A. baumannii</a:t>
-            </a:r>
-          </a:p>
-          <a:p>
-            <a:pPr>
-              <a:spcAft>
-                <a:spcPts val="800"/>
-              </a:spcAft>
-              <a:defRPr sz="2000">
-                <a:solidFill>
-                  <a:srgbClr val="323232"/>
-                </a:solidFill>
-                <a:latin typeface="Calibri"/>
-              </a:defRPr>
-            </a:pPr>
-            <a:r>
-              <a:t>  Collaboration: MIT + Broad Institute</a:t>
-            </a:r>
-          </a:p>
-          <a:p>
-            <a:pPr>
-              <a:spcAft>
-                <a:spcPts val="800"/>
-              </a:spcAft>
-              <a:defRPr sz="2000">
-                <a:solidFill>
-                  <a:srgbClr val="323232"/>
-                </a:solidFill>
-                <a:latin typeface="Calibri"/>
-              </a:defRPr>
-            </a:pPr>
-          </a:p>
-          <a:p>
-            <a:pPr>
-              <a:spcAft>
-                <a:spcPts val="800"/>
-              </a:spcAft>
-              <a:defRPr sz="2000">
-                <a:solidFill>
-                  <a:srgbClr val="323232"/>
-                </a:solidFill>
-                <a:latin typeface="Calibri"/>
-              </a:defRPr>
-            </a:pPr>
-            <a:r>
-              <a:t>Chemprop - D-MPNN from MIT (Yang et al. 2019, JCIM 59:3370-3388)</a:t>
-            </a:r>
-          </a:p>
-          <a:p>
-            <a:pPr>
-              <a:spcAft>
-                <a:spcPts val="800"/>
-              </a:spcAft>
-              <a:defRPr sz="2000">
-                <a:solidFill>
-                  <a:srgbClr val="323232"/>
-                </a:solidFill>
-                <a:latin typeface="Calibri"/>
-              </a:defRPr>
-            </a:pPr>
-            <a:r>
-              <a:t>  Open-source MPNN achieving state-of-the-art on MoleculeNet</a:t>
-            </a:r>
-          </a:p>
-          <a:p>
-            <a:pPr>
-              <a:spcAft>
-                <a:spcPts val="800"/>
-              </a:spcAft>
-              <a:defRPr sz="2000">
-                <a:solidFill>
-                  <a:srgbClr val="323232"/>
-                </a:solidFill>
-                <a:latin typeface="Calibri"/>
-              </a:defRPr>
-            </a:pPr>
-          </a:p>
-          <a:p>
-            <a:pPr>
-              <a:spcAft>
-                <a:spcPts val="800"/>
-              </a:spcAft>
-              <a:defRPr sz="2000">
-                <a:solidFill>
-                  <a:srgbClr val="323232"/>
-                </a:solidFill>
-                <a:latin typeface="Calibri"/>
-              </a:defRPr>
-            </a:pPr>
-            <a:r>
-              <a:t>Recursion Pharmaceuticals - high-content imaging + GNNs</a:t>
-            </a:r>
-          </a:p>
-          <a:p>
-            <a:pPr>
-              <a:spcAft>
-                <a:spcPts val="800"/>
-              </a:spcAft>
-              <a:defRPr sz="2000">
-                <a:solidFill>
-                  <a:srgbClr val="323232"/>
-                </a:solidFill>
-                <a:latin typeface="Calibri"/>
-              </a:defRPr>
-            </a:pPr>
-            <a:r>
-              <a:t>  Combining cell painting (microscopy) with molecular graphs</a:t>
+              <a:t>Drug Discovery:</a:t>
+            </a:r>
+          </a:p>
+          <a:p>
+            <a:pPr>
+              <a:spcAft>
+                <a:spcPts val="800"/>
+              </a:spcAft>
+              <a:defRPr sz="2000">
+                <a:solidFill>
+                  <a:srgbClr val="323232"/>
+                </a:solidFill>
+                <a:latin typeface="Calibri"/>
+              </a:defRPr>
+            </a:pPr>
+            <a:r>
+              <a:t>  Stokes et al. (2020), Cell - Halicin antibiotic discovery via neural nets</a:t>
+            </a:r>
+          </a:p>
+          <a:p>
+            <a:pPr>
+              <a:spcAft>
+                <a:spcPts val="800"/>
+              </a:spcAft>
+              <a:defRPr sz="2000">
+                <a:solidFill>
+                  <a:srgbClr val="323232"/>
+                </a:solidFill>
+                <a:latin typeface="Calibri"/>
+              </a:defRPr>
+            </a:pPr>
+            <a:r>
+              <a:t>  Chemprop D-MPNN (Yang et al. 2019) - state-of-the-art molecular GNN</a:t>
+            </a:r>
+          </a:p>
+          <a:p>
+            <a:pPr>
+              <a:spcAft>
+                <a:spcPts val="800"/>
+              </a:spcAft>
+              <a:defRPr sz="2000">
+                <a:solidFill>
+                  <a:srgbClr val="323232"/>
+                </a:solidFill>
+                <a:latin typeface="Calibri"/>
+              </a:defRPr>
+            </a:pPr>
+          </a:p>
+          <a:p>
+            <a:pPr>
+              <a:spcAft>
+                <a:spcPts val="800"/>
+              </a:spcAft>
+              <a:defRPr sz="2000">
+                <a:solidFill>
+                  <a:srgbClr val="323232"/>
+                </a:solidFill>
+                <a:latin typeface="Calibri"/>
+              </a:defRPr>
+            </a:pPr>
+            <a:r>
+              <a:t>Neuroscience:</a:t>
+            </a:r>
+          </a:p>
+          <a:p>
+            <a:pPr>
+              <a:spcAft>
+                <a:spcPts val="800"/>
+              </a:spcAft>
+              <a:defRPr sz="2000">
+                <a:solidFill>
+                  <a:srgbClr val="323232"/>
+                </a:solidFill>
+                <a:latin typeface="Calibri"/>
+              </a:defRPr>
+            </a:pPr>
+            <a:r>
+              <a:t>  Connectomics: GNNs predict neuron types from synaptic connectivity</a:t>
+            </a:r>
+          </a:p>
+          <a:p>
+            <a:pPr>
+              <a:spcAft>
+                <a:spcPts val="800"/>
+              </a:spcAft>
+              <a:defRPr sz="2000">
+                <a:solidFill>
+                  <a:srgbClr val="323232"/>
+                </a:solidFill>
+                <a:latin typeface="Calibri"/>
+              </a:defRPr>
+            </a:pPr>
+            <a:r>
+              <a:t>  Brain imaging: GNNs on EEG/fMRI graphs for disease classification</a:t>
+            </a:r>
+          </a:p>
+          <a:p>
+            <a:pPr>
+              <a:spcAft>
+                <a:spcPts val="800"/>
+              </a:spcAft>
+              <a:defRPr sz="2000">
+                <a:solidFill>
+                  <a:srgbClr val="323232"/>
+                </a:solidFill>
+                <a:latin typeface="Calibri"/>
+              </a:defRPr>
+            </a:pPr>
+            <a:r>
+              <a:t>  Drug effect prediction: GNNs on brain connectivity before/after drug</a:t>
+            </a:r>
+          </a:p>
+          <a:p>
+            <a:pPr>
+              <a:spcAft>
+                <a:spcPts val="800"/>
+              </a:spcAft>
+              <a:defRPr sz="2000">
+                <a:solidFill>
+                  <a:srgbClr val="323232"/>
+                </a:solidFill>
+                <a:latin typeface="Calibri"/>
+              </a:defRPr>
+            </a:pPr>
+          </a:p>
+          <a:p>
+            <a:pPr>
+              <a:spcAft>
+                <a:spcPts val="800"/>
+              </a:spcAft>
+              <a:defRPr sz="2000">
+                <a:solidFill>
+                  <a:srgbClr val="323232"/>
+                </a:solidFill>
+                <a:latin typeface="Calibri"/>
+              </a:defRPr>
+            </a:pPr>
+            <a:r>
+              <a:t>From Dr. Serbe-Kamp's field:</a:t>
+            </a:r>
+          </a:p>
+          <a:p>
+            <a:pPr>
+              <a:spcAft>
+                <a:spcPts val="800"/>
+              </a:spcAft>
+              <a:defRPr sz="2000">
+                <a:solidFill>
+                  <a:srgbClr val="323232"/>
+                </a:solidFill>
+                <a:latin typeface="Calibri"/>
+              </a:defRPr>
+            </a:pPr>
+            <a:r>
+              <a:t>  Drosophila connectome (Dorkenwald et al. 2024, Nature) -&gt; graph dataset</a:t>
+            </a:r>
+          </a:p>
+          <a:p>
+            <a:pPr>
+              <a:spcAft>
+                <a:spcPts val="800"/>
+              </a:spcAft>
+              <a:defRPr sz="2000">
+                <a:solidFill>
+                  <a:srgbClr val="323232"/>
+                </a:solidFill>
+                <a:latin typeface="Calibri"/>
+              </a:defRPr>
+            </a:pPr>
+            <a:r>
+              <a:t>  T4/T5 motion circuit: mapped by EM connectomics, validated by physiology</a:t>
             </a:r>
           </a:p>
           <a:p>
@@ -7859,7 +8034,7 @@
               </a:defRPr>
             </a:pPr>
             <a:r>
-              <a:t>Cross-Domain: GNNs Meet Human Physiology</a:t>
+              <a:t>Cross-Domain: GNNs from Molecules to Connectomics</a:t>
             </a:r>
           </a:p>
         </p:txBody>
@@ -7898,222 +8073,190 @@
               </a:defRPr>
             </a:pPr>
             <a:r>
-              <a:t>Same GNN architecture, different biological domains:</a:t>
-            </a:r>
-          </a:p>
-          <a:p>
-            <a:pPr>
-              <a:spcAft>
-                <a:spcPts val="800"/>
-              </a:spcAft>
-              <a:defRPr sz="2000">
-                <a:solidFill>
-                  <a:srgbClr val="323232"/>
-                </a:solidFill>
-                <a:latin typeface="Calibri"/>
-              </a:defRPr>
-            </a:pPr>
-          </a:p>
-          <a:p>
-            <a:pPr>
-              <a:spcAft>
-                <a:spcPts val="800"/>
-              </a:spcAft>
-              <a:defRPr sz="2000">
-                <a:solidFill>
-                  <a:srgbClr val="323232"/>
-                </a:solidFill>
-                <a:latin typeface="Calibri"/>
-              </a:defRPr>
-            </a:pPr>
-            <a:r>
-              <a:t>Molecular graph:</a:t>
-            </a:r>
-          </a:p>
-          <a:p>
-            <a:pPr>
-              <a:spcAft>
-                <a:spcPts val="800"/>
-              </a:spcAft>
-              <a:defRPr sz="2000">
-                <a:solidFill>
-                  <a:srgbClr val="323232"/>
-                </a:solidFill>
-                <a:latin typeface="Calibri"/>
-              </a:defRPr>
-            </a:pPr>
-            <a:r>
-              <a:t>  Nodes = atoms | Edges = bonds</a:t>
-            </a:r>
-          </a:p>
-          <a:p>
-            <a:pPr>
-              <a:spcAft>
-                <a:spcPts val="800"/>
-              </a:spcAft>
-              <a:defRPr sz="2000">
-                <a:solidFill>
-                  <a:srgbClr val="323232"/>
-                </a:solidFill>
-                <a:latin typeface="Calibri"/>
-              </a:defRPr>
-            </a:pPr>
-            <a:r>
-              <a:t>  Task: predict molecular properties (toxicity, solubility, binding)</a:t>
-            </a:r>
-          </a:p>
-          <a:p>
-            <a:pPr>
-              <a:spcAft>
-                <a:spcPts val="800"/>
-              </a:spcAft>
-              <a:defRPr sz="2000">
-                <a:solidFill>
-                  <a:srgbClr val="323232"/>
-                </a:solidFill>
-                <a:latin typeface="Calibri"/>
-              </a:defRPr>
-            </a:pPr>
-          </a:p>
-          <a:p>
-            <a:pPr>
-              <a:spcAft>
-                <a:spcPts val="800"/>
-              </a:spcAft>
-              <a:defRPr sz="2000">
-                <a:solidFill>
-                  <a:srgbClr val="323232"/>
-                </a:solidFill>
-                <a:latin typeface="Calibri"/>
-              </a:defRPr>
-            </a:pPr>
-            <a:r>
-              <a:t>Neural / physiological graph:</a:t>
-            </a:r>
-          </a:p>
-          <a:p>
-            <a:pPr>
-              <a:spcAft>
-                <a:spcPts val="800"/>
-              </a:spcAft>
-              <a:defRPr sz="2000">
-                <a:solidFill>
-                  <a:srgbClr val="323232"/>
-                </a:solidFill>
-                <a:latin typeface="Calibri"/>
-              </a:defRPr>
-            </a:pPr>
-            <a:r>
-              <a:t>  Nodes = recording electrodes (EEG/EMG/ECG sensors)</a:t>
-            </a:r>
-          </a:p>
-          <a:p>
-            <a:pPr>
-              <a:spcAft>
-                <a:spcPts val="800"/>
-              </a:spcAft>
-              <a:defRPr sz="2000">
-                <a:solidFill>
-                  <a:srgbClr val="323232"/>
-                </a:solidFill>
-                <a:latin typeface="Calibri"/>
-              </a:defRPr>
-            </a:pPr>
-            <a:r>
-              <a:t>  Edges = functional connectivity (correlation between channels)</a:t>
-            </a:r>
-          </a:p>
-          <a:p>
-            <a:pPr>
-              <a:spcAft>
-                <a:spcPts val="800"/>
-              </a:spcAft>
-              <a:defRPr sz="2000">
-                <a:solidFill>
-                  <a:srgbClr val="323232"/>
-                </a:solidFill>
-                <a:latin typeface="Calibri"/>
-              </a:defRPr>
-            </a:pPr>
-            <a:r>
-              <a:t>  Task: classify brain states, detect drug effects on physiology</a:t>
-            </a:r>
-          </a:p>
-          <a:p>
-            <a:pPr>
-              <a:spcAft>
-                <a:spcPts val="800"/>
-              </a:spcAft>
-              <a:defRPr sz="2000">
-                <a:solidFill>
-                  <a:srgbClr val="323232"/>
-                </a:solidFill>
-                <a:latin typeface="Calibri"/>
-              </a:defRPr>
-            </a:pPr>
-          </a:p>
-          <a:p>
-            <a:pPr>
-              <a:spcAft>
-                <a:spcPts val="800"/>
-              </a:spcAft>
-              <a:defRPr sz="2000">
-                <a:solidFill>
-                  <a:srgbClr val="323232"/>
-                </a:solidFill>
-                <a:latin typeface="Calibri"/>
-              </a:defRPr>
-            </a:pPr>
-            <a:r>
-              <a:t>Human physiology experiments with SpikerBot:</a:t>
-            </a:r>
-          </a:p>
-          <a:p>
-            <a:pPr>
-              <a:spcAft>
-                <a:spcPts val="800"/>
-              </a:spcAft>
-              <a:defRPr sz="2000">
-                <a:solidFill>
-                  <a:srgbClr val="323232"/>
-                </a:solidFill>
-                <a:latin typeface="Calibri"/>
-              </a:defRPr>
-            </a:pPr>
-            <a:r>
-              <a:t>  Record EMG from your own muscles - see motor unit recruitment</a:t>
-            </a:r>
-          </a:p>
-          <a:p>
-            <a:pPr>
-              <a:spcAft>
-                <a:spcPts val="800"/>
-              </a:spcAft>
-              <a:defRPr sz="2000">
-                <a:solidFill>
-                  <a:srgbClr val="323232"/>
-                </a:solidFill>
-                <a:latin typeface="Calibri"/>
-              </a:defRPr>
-            </a:pPr>
-            <a:r>
-              <a:t>  Record ECG - measure QT interval (hERG drug safety target!)</a:t>
-            </a:r>
-          </a:p>
-          <a:p>
-            <a:pPr>
-              <a:spcAft>
-                <a:spcPts val="800"/>
-              </a:spcAft>
-              <a:defRPr sz="2000">
-                <a:solidFill>
-                  <a:srgbClr val="323232"/>
-                </a:solidFill>
-                <a:latin typeface="Calibri"/>
-              </a:defRPr>
-            </a:pPr>
-            <a:r>
-              <a:t>  Compare: how does caffeine / exercise change YOUR signals?</a:t>
+              <a:t>Same GNN architecture, different biological graphs:</a:t>
+            </a:r>
+          </a:p>
+          <a:p>
+            <a:pPr>
+              <a:spcAft>
+                <a:spcPts val="800"/>
+              </a:spcAft>
+              <a:defRPr sz="2000">
+                <a:solidFill>
+                  <a:srgbClr val="323232"/>
+                </a:solidFill>
+                <a:latin typeface="Calibri"/>
+              </a:defRPr>
+            </a:pPr>
+          </a:p>
+          <a:p>
+            <a:pPr>
+              <a:spcAft>
+                <a:spcPts val="800"/>
+              </a:spcAft>
+              <a:defRPr sz="2000">
+                <a:solidFill>
+                  <a:srgbClr val="323232"/>
+                </a:solidFill>
+                <a:latin typeface="Calibri"/>
+              </a:defRPr>
+            </a:pPr>
+            <a:r>
+              <a:t>Molecular graph:  Nodes = atoms | Edges = bonds | Task: predict activity</a:t>
+            </a:r>
+          </a:p>
+          <a:p>
+            <a:pPr>
+              <a:spcAft>
+                <a:spcPts val="800"/>
+              </a:spcAft>
+              <a:defRPr sz="2000">
+                <a:solidFill>
+                  <a:srgbClr val="323232"/>
+                </a:solidFill>
+                <a:latin typeface="Calibri"/>
+              </a:defRPr>
+            </a:pPr>
+          </a:p>
+          <a:p>
+            <a:pPr>
+              <a:spcAft>
+                <a:spcPts val="800"/>
+              </a:spcAft>
+              <a:defRPr sz="2000">
+                <a:solidFill>
+                  <a:srgbClr val="323232"/>
+                </a:solidFill>
+                <a:latin typeface="Calibri"/>
+              </a:defRPr>
+            </a:pPr>
+            <a:r>
+              <a:t>Brain connectome graph (from Dr. Serbe-Kamp's research area):</a:t>
+            </a:r>
+          </a:p>
+          <a:p>
+            <a:pPr>
+              <a:spcAft>
+                <a:spcPts val="800"/>
+              </a:spcAft>
+              <a:defRPr sz="2000">
+                <a:solidFill>
+                  <a:srgbClr val="323232"/>
+                </a:solidFill>
+                <a:latin typeface="Calibri"/>
+              </a:defRPr>
+            </a:pPr>
+            <a:r>
+              <a:t>  Nodes = neurons (~140,000 in Drosophila brain)</a:t>
+            </a:r>
+          </a:p>
+          <a:p>
+            <a:pPr>
+              <a:spcAft>
+                <a:spcPts val="800"/>
+              </a:spcAft>
+              <a:defRPr sz="2000">
+                <a:solidFill>
+                  <a:srgbClr val="323232"/>
+                </a:solidFill>
+                <a:latin typeface="Calibri"/>
+              </a:defRPr>
+            </a:pPr>
+            <a:r>
+              <a:t>  Edges = synaptic connections (~50 million synapses!)</a:t>
+            </a:r>
+          </a:p>
+          <a:p>
+            <a:pPr>
+              <a:spcAft>
+                <a:spcPts val="800"/>
+              </a:spcAft>
+              <a:defRPr sz="2000">
+                <a:solidFill>
+                  <a:srgbClr val="323232"/>
+                </a:solidFill>
+                <a:latin typeface="Calibri"/>
+              </a:defRPr>
+            </a:pPr>
+            <a:r>
+              <a:t>  Task: predict neuron type, classify circuits, find drug targets</a:t>
+            </a:r>
+          </a:p>
+          <a:p>
+            <a:pPr>
+              <a:spcAft>
+                <a:spcPts val="800"/>
+              </a:spcAft>
+              <a:defRPr sz="2000">
+                <a:solidFill>
+                  <a:srgbClr val="323232"/>
+                </a:solidFill>
+                <a:latin typeface="Calibri"/>
+              </a:defRPr>
+            </a:pPr>
+          </a:p>
+          <a:p>
+            <a:pPr>
+              <a:spcAft>
+                <a:spcPts val="800"/>
+              </a:spcAft>
+              <a:defRPr sz="2000">
+                <a:solidFill>
+                  <a:srgbClr val="323232"/>
+                </a:solidFill>
+                <a:latin typeface="Calibri"/>
+              </a:defRPr>
+            </a:pPr>
+            <a:r>
+              <a:t>The Drosophila connectome (FlyWire, Dorkenwald et al. 2024, Nature):</a:t>
+            </a:r>
+          </a:p>
+          <a:p>
+            <a:pPr>
+              <a:spcAft>
+                <a:spcPts val="800"/>
+              </a:spcAft>
+              <a:defRPr sz="2000">
+                <a:solidFill>
+                  <a:srgbClr val="323232"/>
+                </a:solidFill>
+                <a:latin typeface="Calibri"/>
+              </a:defRPr>
+            </a:pPr>
+            <a:r>
+              <a:t>  Complete wiring diagram of an entire brain - a GRAPH DATASET</a:t>
+            </a:r>
+          </a:p>
+          <a:p>
+            <a:pPr>
+              <a:spcAft>
+                <a:spcPts val="800"/>
+              </a:spcAft>
+              <a:defRPr sz="2000">
+                <a:solidFill>
+                  <a:srgbClr val="323232"/>
+                </a:solidFill>
+                <a:latin typeface="Calibri"/>
+              </a:defRPr>
+            </a:pPr>
+            <a:r>
+              <a:t>  GNNs predict neuron types from connectivity patterns</a:t>
+            </a:r>
+          </a:p>
+          <a:p>
+            <a:pPr>
+              <a:spcAft>
+                <a:spcPts val="800"/>
+              </a:spcAft>
+              <a:defRPr sz="2000">
+                <a:solidFill>
+                  <a:srgbClr val="323232"/>
+                </a:solidFill>
+                <a:latin typeface="Calibri"/>
+              </a:defRPr>
+            </a:pPr>
+            <a:r>
+              <a:t>  Dr. Serbe-Kamp used connectomics to map visual motion circuits</a:t>
             </a:r>
           </a:p>
           <a:p>
